--- a/pptx-asset-library/decks/01_tables/TBL_bulk_leftlabel_v1.pptx
+++ b/pptx-asset-library/decks/01_tables/TBL_bulk_leftlabel_v1.pptx
@@ -3189,7 +3189,7 @@
           <a:graphicData uri="http://schemas.openxmlformats.org/drawingml/2006/table">
             <a:tbl>
               <a:tblPr>
-                <a:tableStyleId>{2D5ABB26-0587-4C30-8999-92F81FD0307C}</a:tableStyleId>
+                <a:tableStyleId>{5C22544A-7EE6-4342-B048-85BDC9FD1C3A}</a:tableStyleId>
               </a:tblPr>
               <a:tblGrid>
                 <a:gridCol w="2560320"/>
@@ -4256,7 +4256,7 @@
           <a:graphicData uri="http://schemas.openxmlformats.org/drawingml/2006/table">
             <a:tbl>
               <a:tblPr>
-                <a:tableStyleId>{2D5ABB26-0587-4C30-8999-92F81FD0307C}</a:tableStyleId>
+                <a:tableStyleId>{5C22544A-7EE6-4342-B048-85BDC9FD1C3A}</a:tableStyleId>
               </a:tblPr>
               <a:tblGrid>
                 <a:gridCol w="2560320"/>
@@ -5505,7 +5505,7 @@
           <a:graphicData uri="http://schemas.openxmlformats.org/drawingml/2006/table">
             <a:tbl>
               <a:tblPr>
-                <a:tableStyleId>{2D5ABB26-0587-4C30-8999-92F81FD0307C}</a:tableStyleId>
+                <a:tableStyleId>{5C22544A-7EE6-4342-B048-85BDC9FD1C3A}</a:tableStyleId>
               </a:tblPr>
               <a:tblGrid>
                 <a:gridCol w="2560320"/>
@@ -7025,7 +7025,7 @@
           <a:graphicData uri="http://schemas.openxmlformats.org/drawingml/2006/table">
             <a:tbl>
               <a:tblPr>
-                <a:tableStyleId>{2D5ABB26-0587-4C30-8999-92F81FD0307C}</a:tableStyleId>
+                <a:tableStyleId>{5C22544A-7EE6-4342-B048-85BDC9FD1C3A}</a:tableStyleId>
               </a:tblPr>
               <a:tblGrid>
                 <a:gridCol w="2560320"/>
@@ -8816,7 +8816,7 @@
           <a:graphicData uri="http://schemas.openxmlformats.org/drawingml/2006/table">
             <a:tbl>
               <a:tblPr>
-                <a:tableStyleId>{2D5ABB26-0587-4C30-8999-92F81FD0307C}</a:tableStyleId>
+                <a:tableStyleId>{5C22544A-7EE6-4342-B048-85BDC9FD1C3A}</a:tableStyleId>
               </a:tblPr>
               <a:tblGrid>
                 <a:gridCol w="2560320"/>
@@ -10109,7 +10109,7 @@
           <a:graphicData uri="http://schemas.openxmlformats.org/drawingml/2006/table">
             <a:tbl>
               <a:tblPr>
-                <a:tableStyleId>{2D5ABB26-0587-4C30-8999-92F81FD0307C}</a:tableStyleId>
+                <a:tableStyleId>{5C22544A-7EE6-4342-B048-85BDC9FD1C3A}</a:tableStyleId>
               </a:tblPr>
               <a:tblGrid>
                 <a:gridCol w="2560320"/>
@@ -11628,7 +11628,7 @@
           <a:graphicData uri="http://schemas.openxmlformats.org/drawingml/2006/table">
             <a:tbl>
               <a:tblPr>
-                <a:tableStyleId>{2D5ABB26-0587-4C30-8999-92F81FD0307C}</a:tableStyleId>
+                <a:tableStyleId>{5C22544A-7EE6-4342-B048-85BDC9FD1C3A}</a:tableStyleId>
               </a:tblPr>
               <a:tblGrid>
                 <a:gridCol w="2560320"/>
@@ -12877,7 +12877,7 @@
           <a:graphicData uri="http://schemas.openxmlformats.org/drawingml/2006/table">
             <a:tbl>
               <a:tblPr>
-                <a:tableStyleId>{2D5ABB26-0587-4C30-8999-92F81FD0307C}</a:tableStyleId>
+                <a:tableStyleId>{5C22544A-7EE6-4342-B048-85BDC9FD1C3A}</a:tableStyleId>
               </a:tblPr>
               <a:tblGrid>
                 <a:gridCol w="2560320"/>
@@ -14397,7 +14397,7 @@
           <a:graphicData uri="http://schemas.openxmlformats.org/drawingml/2006/table">
             <a:tbl>
               <a:tblPr>
-                <a:tableStyleId>{2D5ABB26-0587-4C30-8999-92F81FD0307C}</a:tableStyleId>
+                <a:tableStyleId>{5C22544A-7EE6-4342-B048-85BDC9FD1C3A}</a:tableStyleId>
               </a:tblPr>
               <a:tblGrid>
                 <a:gridCol w="2560320"/>
@@ -16188,7 +16188,7 @@
           <a:graphicData uri="http://schemas.openxmlformats.org/drawingml/2006/table">
             <a:tbl>
               <a:tblPr>
-                <a:tableStyleId>{2D5ABB26-0587-4C30-8999-92F81FD0307C}</a:tableStyleId>
+                <a:tableStyleId>{5C22544A-7EE6-4342-B048-85BDC9FD1C3A}</a:tableStyleId>
               </a:tblPr>
               <a:tblGrid>
                 <a:gridCol w="2560320"/>
@@ -17255,7 +17255,7 @@
           <a:graphicData uri="http://schemas.openxmlformats.org/drawingml/2006/table">
             <a:tbl>
               <a:tblPr>
-                <a:tableStyleId>{2D5ABB26-0587-4C30-8999-92F81FD0307C}</a:tableStyleId>
+                <a:tableStyleId>{5C22544A-7EE6-4342-B048-85BDC9FD1C3A}</a:tableStyleId>
               </a:tblPr>
               <a:tblGrid>
                 <a:gridCol w="2560320"/>
@@ -18548,7 +18548,7 @@
           <a:graphicData uri="http://schemas.openxmlformats.org/drawingml/2006/table">
             <a:tbl>
               <a:tblPr>
-                <a:tableStyleId>{2D5ABB26-0587-4C30-8999-92F81FD0307C}</a:tableStyleId>
+                <a:tableStyleId>{5C22544A-7EE6-4342-B048-85BDC9FD1C3A}</a:tableStyleId>
               </a:tblPr>
               <a:tblGrid>
                 <a:gridCol w="2560320"/>
